--- a/public/publications/4-3 ratio.pptx
+++ b/public/publications/4-3 ratio.pptx
@@ -3704,6 +3704,47 @@
           </a:p>
         </p:txBody>
       </p:sp>
+      <p:pic>
+        <p:nvPicPr>
+          <p:cNvPr id="3" name="图片 2" descr="图示&#10;&#10;AI 生成的内容可能不正确。">
+            <a:extLst>
+              <a:ext uri="{FF2B5EF4-FFF2-40B4-BE49-F238E27FC236}">
+                <a16:creationId xmlns:a16="http://schemas.microsoft.com/office/drawing/2014/main" id="{8A385327-DBC0-B717-AC97-31ECA1F959C1}"/>
+              </a:ext>
+            </a:extLst>
+          </p:cNvPr>
+          <p:cNvPicPr>
+            <a:picLocks noChangeAspect="1"/>
+          </p:cNvPicPr>
+          <p:nvPr/>
+        </p:nvPicPr>
+        <p:blipFill>
+          <a:blip r:embed="rId2">
+            <a:clrChange>
+              <a:clrFrom>
+                <a:srgbClr val="FFFFFF"/>
+              </a:clrFrom>
+              <a:clrTo>
+                <a:srgbClr val="FFFFFF">
+                  <a:alpha val="0"/>
+                </a:srgbClr>
+              </a:clrTo>
+            </a:clrChange>
+          </a:blip>
+          <a:stretch>
+            <a:fillRect/>
+          </a:stretch>
+        </p:blipFill>
+        <p:spPr>
+          <a:xfrm>
+            <a:off x="351691" y="1664155"/>
+            <a:ext cx="8299939" cy="3529689"/>
+          </a:xfrm>
+          <a:prstGeom prst="rect">
+            <a:avLst/>
+          </a:prstGeom>
+        </p:spPr>
+      </p:pic>
     </p:spTree>
     <p:extLst>
       <p:ext uri="{BB962C8B-B14F-4D97-AF65-F5344CB8AC3E}">
@@ -3797,6 +3838,47 @@
           </a:p>
         </p:txBody>
       </p:sp>
+      <p:pic>
+        <p:nvPicPr>
+          <p:cNvPr id="3" name="图片 2" descr="徽标&#10;&#10;AI 生成的内容可能不正确。">
+            <a:extLst>
+              <a:ext uri="{FF2B5EF4-FFF2-40B4-BE49-F238E27FC236}">
+                <a16:creationId xmlns:a16="http://schemas.microsoft.com/office/drawing/2014/main" id="{C9262F8B-0DDE-F07E-840B-C144C046A431}"/>
+              </a:ext>
+            </a:extLst>
+          </p:cNvPr>
+          <p:cNvPicPr>
+            <a:picLocks noChangeAspect="1"/>
+          </p:cNvPicPr>
+          <p:nvPr/>
+        </p:nvPicPr>
+        <p:blipFill>
+          <a:blip r:embed="rId2">
+            <a:clrChange>
+              <a:clrFrom>
+                <a:srgbClr val="FFFFFF"/>
+              </a:clrFrom>
+              <a:clrTo>
+                <a:srgbClr val="FFFFFF">
+                  <a:alpha val="0"/>
+                </a:srgbClr>
+              </a:clrTo>
+            </a:clrChange>
+          </a:blip>
+          <a:stretch>
+            <a:fillRect/>
+          </a:stretch>
+        </p:blipFill>
+        <p:spPr>
+          <a:xfrm>
+            <a:off x="115263" y="1956288"/>
+            <a:ext cx="8913473" cy="2945424"/>
+          </a:xfrm>
+          <a:prstGeom prst="rect">
+            <a:avLst/>
+          </a:prstGeom>
+        </p:spPr>
+      </p:pic>
     </p:spTree>
     <p:extLst>
       <p:ext uri="{BB962C8B-B14F-4D97-AF65-F5344CB8AC3E}">
